--- a/projects/ANYANG-LOGIS/03_IM_투자심의/투심자료/20260929_투심자료_3종종류주식_발행가액산정_v02.pptx
+++ b/projects/ANYANG-LOGIS/03_IM_투자심의/투심자료/20260929_투심자료_3종종류주식_발행가액산정_v02.pptx
@@ -20873,7 +20873,7 @@
         </p:nvGraphicFramePr>
         <p:xfrm>
           <a:off x="521207" y="2359152"/>
-          <a:ext cx="9966960" cy="1344168"/>
+          <a:ext cx="9966960" cy="1152144"/>
         </p:xfrm>
         <a:graphic>
           <a:graphicData uri="http://schemas.openxmlformats.org/drawingml/2006/table">
@@ -20901,7 +20901,7 @@
                     <a:p>
                       <a:pPr algn="ctr">
                         <a:lnSpc>
-                          <a:spcPct val="82000"/>
+                          <a:spcPct val="90000"/>
                         </a:lnSpc>
                         <a:spcBef>
                           <a:spcPts val="0"/>
@@ -20934,7 +20934,7 @@
                     <a:p>
                       <a:pPr algn="ctr">
                         <a:lnSpc>
-                          <a:spcPct val="82000"/>
+                          <a:spcPct val="90000"/>
                         </a:lnSpc>
                         <a:spcBef>
                           <a:spcPts val="0"/>
@@ -20967,7 +20967,7 @@
                     <a:p>
                       <a:pPr algn="ctr">
                         <a:lnSpc>
-                          <a:spcPct val="82000"/>
+                          <a:spcPct val="90000"/>
                         </a:lnSpc>
                         <a:spcBef>
                           <a:spcPts val="0"/>
@@ -21000,7 +21000,7 @@
                     <a:p>
                       <a:pPr algn="ctr">
                         <a:lnSpc>
-                          <a:spcPct val="82000"/>
+                          <a:spcPct val="90000"/>
                         </a:lnSpc>
                         <a:spcBef>
                           <a:spcPts val="0"/>
@@ -21033,7 +21033,7 @@
                     <a:p>
                       <a:pPr algn="ctr">
                         <a:lnSpc>
-                          <a:spcPct val="82000"/>
+                          <a:spcPct val="90000"/>
                         </a:lnSpc>
                         <a:spcBef>
                           <a:spcPts val="0"/>
@@ -21066,7 +21066,7 @@
                     <a:p>
                       <a:pPr algn="ctr">
                         <a:lnSpc>
-                          <a:spcPct val="82000"/>
+                          <a:spcPct val="90000"/>
                         </a:lnSpc>
                         <a:spcBef>
                           <a:spcPts val="0"/>
@@ -21099,7 +21099,7 @@
                     <a:p>
                       <a:pPr algn="ctr">
                         <a:lnSpc>
-                          <a:spcPct val="82000"/>
+                          <a:spcPct val="90000"/>
                         </a:lnSpc>
                         <a:spcBef>
                           <a:spcPts val="0"/>
@@ -21132,7 +21132,7 @@
                     <a:p>
                       <a:pPr algn="ctr">
                         <a:lnSpc>
-                          <a:spcPct val="82000"/>
+                          <a:spcPct val="90000"/>
                         </a:lnSpc>
                         <a:spcBef>
                           <a:spcPts val="0"/>
@@ -21165,7 +21165,7 @@
                     <a:p>
                       <a:pPr algn="ctr">
                         <a:lnSpc>
-                          <a:spcPct val="82000"/>
+                          <a:spcPct val="90000"/>
                         </a:lnSpc>
                         <a:spcBef>
                           <a:spcPts val="0"/>
@@ -21198,7 +21198,7 @@
                     <a:p>
                       <a:pPr algn="ctr">
                         <a:lnSpc>
-                          <a:spcPct val="82000"/>
+                          <a:spcPct val="90000"/>
                         </a:lnSpc>
                         <a:spcBef>
                           <a:spcPts val="0"/>
@@ -21233,7 +21233,7 @@
                     <a:p>
                       <a:pPr algn="ctr">
                         <a:lnSpc>
-                          <a:spcPct val="82000"/>
+                          <a:spcPct val="90000"/>
                         </a:lnSpc>
                         <a:spcBef>
                           <a:spcPts val="0"/>
@@ -21266,7 +21266,7 @@
                     <a:p>
                       <a:pPr algn="l">
                         <a:lnSpc>
-                          <a:spcPct val="82000"/>
+                          <a:spcPct val="90000"/>
                         </a:lnSpc>
                         <a:spcBef>
                           <a:spcPts val="0"/>
@@ -21299,7 +21299,7 @@
                     <a:p>
                       <a:pPr algn="l">
                         <a:lnSpc>
-                          <a:spcPct val="82000"/>
+                          <a:spcPct val="90000"/>
                         </a:lnSpc>
                         <a:spcBef>
                           <a:spcPts val="0"/>
@@ -21332,7 +21332,7 @@
                     <a:p>
                       <a:pPr algn="l">
                         <a:lnSpc>
-                          <a:spcPct val="82000"/>
+                          <a:spcPct val="90000"/>
                         </a:lnSpc>
                         <a:spcBef>
                           <a:spcPts val="0"/>
@@ -21365,7 +21365,7 @@
                     <a:p>
                       <a:pPr algn="l">
                         <a:lnSpc>
-                          <a:spcPct val="82000"/>
+                          <a:spcPct val="90000"/>
                         </a:lnSpc>
                         <a:spcBef>
                           <a:spcPts val="0"/>
@@ -21398,7 +21398,7 @@
                     <a:p>
                       <a:pPr algn="l">
                         <a:lnSpc>
-                          <a:spcPct val="82000"/>
+                          <a:spcPct val="90000"/>
                         </a:lnSpc>
                         <a:spcBef>
                           <a:spcPts val="0"/>
@@ -21431,7 +21431,7 @@
                     <a:p>
                       <a:pPr algn="l">
                         <a:lnSpc>
-                          <a:spcPct val="82000"/>
+                          <a:spcPct val="90000"/>
                         </a:lnSpc>
                         <a:spcBef>
                           <a:spcPts val="0"/>
@@ -21464,7 +21464,7 @@
                     <a:p>
                       <a:pPr algn="l">
                         <a:lnSpc>
-                          <a:spcPct val="82000"/>
+                          <a:spcPct val="90000"/>
                         </a:lnSpc>
                         <a:spcBef>
                           <a:spcPts val="0"/>
@@ -21497,7 +21497,7 @@
                     <a:p>
                       <a:pPr algn="l">
                         <a:lnSpc>
-                          <a:spcPct val="82000"/>
+                          <a:spcPct val="90000"/>
                         </a:lnSpc>
                         <a:spcBef>
                           <a:spcPts val="0"/>
@@ -21530,7 +21530,7 @@
                     <a:p>
                       <a:pPr algn="l">
                         <a:lnSpc>
-                          <a:spcPct val="82000"/>
+                          <a:spcPct val="90000"/>
                         </a:lnSpc>
                         <a:spcBef>
                           <a:spcPts val="0"/>
@@ -21565,7 +21565,7 @@
                     <a:p>
                       <a:pPr algn="ctr">
                         <a:lnSpc>
-                          <a:spcPct val="82000"/>
+                          <a:spcPct val="90000"/>
                         </a:lnSpc>
                         <a:spcBef>
                           <a:spcPts val="0"/>
@@ -21598,7 +21598,7 @@
                     <a:p>
                       <a:pPr algn="l">
                         <a:lnSpc>
-                          <a:spcPct val="82000"/>
+                          <a:spcPct val="90000"/>
                         </a:lnSpc>
                         <a:spcBef>
                           <a:spcPts val="0"/>
@@ -21631,7 +21631,7 @@
                     <a:p>
                       <a:pPr algn="l">
                         <a:lnSpc>
-                          <a:spcPct val="82000"/>
+                          <a:spcPct val="90000"/>
                         </a:lnSpc>
                         <a:spcBef>
                           <a:spcPts val="0"/>
@@ -21664,7 +21664,7 @@
                     <a:p>
                       <a:pPr algn="l">
                         <a:lnSpc>
-                          <a:spcPct val="82000"/>
+                          <a:spcPct val="90000"/>
                         </a:lnSpc>
                         <a:spcBef>
                           <a:spcPts val="0"/>
@@ -21697,7 +21697,7 @@
                     <a:p>
                       <a:pPr algn="l">
                         <a:lnSpc>
-                          <a:spcPct val="82000"/>
+                          <a:spcPct val="90000"/>
                         </a:lnSpc>
                         <a:spcBef>
                           <a:spcPts val="0"/>
@@ -21730,7 +21730,7 @@
                     <a:p>
                       <a:pPr algn="l">
                         <a:lnSpc>
-                          <a:spcPct val="82000"/>
+                          <a:spcPct val="90000"/>
                         </a:lnSpc>
                         <a:spcBef>
                           <a:spcPts val="0"/>
@@ -21763,7 +21763,7 @@
                     <a:p>
                       <a:pPr algn="l">
                         <a:lnSpc>
-                          <a:spcPct val="82000"/>
+                          <a:spcPct val="90000"/>
                         </a:lnSpc>
                         <a:spcBef>
                           <a:spcPts val="0"/>
@@ -21796,7 +21796,7 @@
                     <a:p>
                       <a:pPr algn="l">
                         <a:lnSpc>
-                          <a:spcPct val="82000"/>
+                          <a:spcPct val="90000"/>
                         </a:lnSpc>
                         <a:spcBef>
                           <a:spcPts val="0"/>
@@ -21829,7 +21829,7 @@
                     <a:p>
                       <a:pPr algn="l">
                         <a:lnSpc>
-                          <a:spcPct val="82000"/>
+                          <a:spcPct val="90000"/>
                         </a:lnSpc>
                         <a:spcBef>
                           <a:spcPts val="0"/>
@@ -21862,7 +21862,7 @@
                     <a:p>
                       <a:pPr algn="l">
                         <a:lnSpc>
-                          <a:spcPct val="82000"/>
+                          <a:spcPct val="90000"/>
                         </a:lnSpc>
                         <a:spcBef>
                           <a:spcPts val="0"/>
@@ -21897,7 +21897,7 @@
                     <a:p>
                       <a:pPr algn="ctr">
                         <a:lnSpc>
-                          <a:spcPct val="82000"/>
+                          <a:spcPct val="90000"/>
                         </a:lnSpc>
                         <a:spcBef>
                           <a:spcPts val="0"/>
@@ -21930,7 +21930,7 @@
                     <a:p>
                       <a:pPr algn="l">
                         <a:lnSpc>
-                          <a:spcPct val="82000"/>
+                          <a:spcPct val="90000"/>
                         </a:lnSpc>
                         <a:spcBef>
                           <a:spcPts val="0"/>
@@ -21963,7 +21963,7 @@
                     <a:p>
                       <a:pPr algn="l">
                         <a:lnSpc>
-                          <a:spcPct val="82000"/>
+                          <a:spcPct val="90000"/>
                         </a:lnSpc>
                         <a:spcBef>
                           <a:spcPts val="0"/>
@@ -21996,7 +21996,7 @@
                     <a:p>
                       <a:pPr algn="l">
                         <a:lnSpc>
-                          <a:spcPct val="82000"/>
+                          <a:spcPct val="90000"/>
                         </a:lnSpc>
                         <a:spcBef>
                           <a:spcPts val="0"/>
@@ -22029,7 +22029,7 @@
                     <a:p>
                       <a:pPr algn="l">
                         <a:lnSpc>
-                          <a:spcPct val="82000"/>
+                          <a:spcPct val="90000"/>
                         </a:lnSpc>
                         <a:spcBef>
                           <a:spcPts val="0"/>
@@ -22062,7 +22062,7 @@
                     <a:p>
                       <a:pPr algn="l">
                         <a:lnSpc>
-                          <a:spcPct val="82000"/>
+                          <a:spcPct val="90000"/>
                         </a:lnSpc>
                         <a:spcBef>
                           <a:spcPts val="0"/>
@@ -22095,7 +22095,7 @@
                     <a:p>
                       <a:pPr algn="l">
                         <a:lnSpc>
-                          <a:spcPct val="82000"/>
+                          <a:spcPct val="90000"/>
                         </a:lnSpc>
                         <a:spcBef>
                           <a:spcPts val="0"/>
@@ -22128,7 +22128,7 @@
                     <a:p>
                       <a:pPr algn="l">
                         <a:lnSpc>
-                          <a:spcPct val="82000"/>
+                          <a:spcPct val="90000"/>
                         </a:lnSpc>
                         <a:spcBef>
                           <a:spcPts val="0"/>
@@ -22161,7 +22161,7 @@
                     <a:p>
                       <a:pPr algn="l">
                         <a:lnSpc>
-                          <a:spcPct val="82000"/>
+                          <a:spcPct val="90000"/>
                         </a:lnSpc>
                         <a:spcBef>
                           <a:spcPts val="0"/>
@@ -22194,7 +22194,7 @@
                     <a:p>
                       <a:pPr algn="l">
                         <a:lnSpc>
-                          <a:spcPct val="82000"/>
+                          <a:spcPct val="90000"/>
                         </a:lnSpc>
                         <a:spcBef>
                           <a:spcPts val="0"/>
@@ -22229,7 +22229,7 @@
                     <a:p>
                       <a:pPr algn="ctr">
                         <a:lnSpc>
-                          <a:spcPct val="82000"/>
+                          <a:spcPct val="90000"/>
                         </a:lnSpc>
                         <a:spcBef>
                           <a:spcPts val="0"/>
@@ -22262,7 +22262,7 @@
                     <a:p>
                       <a:pPr algn="l">
                         <a:lnSpc>
-                          <a:spcPct val="82000"/>
+                          <a:spcPct val="90000"/>
                         </a:lnSpc>
                         <a:spcBef>
                           <a:spcPts val="0"/>
@@ -22295,7 +22295,7 @@
                     <a:p>
                       <a:pPr algn="l">
                         <a:lnSpc>
-                          <a:spcPct val="82000"/>
+                          <a:spcPct val="90000"/>
                         </a:lnSpc>
                         <a:spcBef>
                           <a:spcPts val="0"/>
@@ -22328,7 +22328,7 @@
                     <a:p>
                       <a:pPr algn="l">
                         <a:lnSpc>
-                          <a:spcPct val="82000"/>
+                          <a:spcPct val="90000"/>
                         </a:lnSpc>
                         <a:spcBef>
                           <a:spcPts val="0"/>
@@ -22361,7 +22361,7 @@
                     <a:p>
                       <a:pPr algn="l">
                         <a:lnSpc>
-                          <a:spcPct val="82000"/>
+                          <a:spcPct val="90000"/>
                         </a:lnSpc>
                         <a:spcBef>
                           <a:spcPts val="0"/>
@@ -22394,7 +22394,7 @@
                     <a:p>
                       <a:pPr algn="l">
                         <a:lnSpc>
-                          <a:spcPct val="82000"/>
+                          <a:spcPct val="90000"/>
                         </a:lnSpc>
                         <a:spcBef>
                           <a:spcPts val="0"/>
@@ -22427,7 +22427,7 @@
                     <a:p>
                       <a:pPr algn="l">
                         <a:lnSpc>
-                          <a:spcPct val="82000"/>
+                          <a:spcPct val="90000"/>
                         </a:lnSpc>
                         <a:spcBef>
                           <a:spcPts val="0"/>
@@ -22460,7 +22460,7 @@
                     <a:p>
                       <a:pPr algn="l">
                         <a:lnSpc>
-                          <a:spcPct val="82000"/>
+                          <a:spcPct val="90000"/>
                         </a:lnSpc>
                         <a:spcBef>
                           <a:spcPts val="0"/>
@@ -22493,7 +22493,7 @@
                     <a:p>
                       <a:pPr algn="l">
                         <a:lnSpc>
-                          <a:spcPct val="82000"/>
+                          <a:spcPct val="90000"/>
                         </a:lnSpc>
                         <a:spcBef>
                           <a:spcPts val="0"/>
@@ -22526,7 +22526,7 @@
                     <a:p>
                       <a:pPr algn="l">
                         <a:lnSpc>
-                          <a:spcPct val="82000"/>
+                          <a:spcPct val="90000"/>
                         </a:lnSpc>
                         <a:spcBef>
                           <a:spcPts val="0"/>
@@ -22561,7 +22561,7 @@
                     <a:p>
                       <a:pPr algn="ctr">
                         <a:lnSpc>
-                          <a:spcPct val="82000"/>
+                          <a:spcPct val="90000"/>
                         </a:lnSpc>
                         <a:spcBef>
                           <a:spcPts val="0"/>
@@ -22594,7 +22594,7 @@
                     <a:p>
                       <a:pPr algn="l">
                         <a:lnSpc>
-                          <a:spcPct val="82000"/>
+                          <a:spcPct val="90000"/>
                         </a:lnSpc>
                         <a:spcBef>
                           <a:spcPts val="0"/>
@@ -22627,7 +22627,7 @@
                     <a:p>
                       <a:pPr algn="l">
                         <a:lnSpc>
-                          <a:spcPct val="82000"/>
+                          <a:spcPct val="90000"/>
                         </a:lnSpc>
                         <a:spcBef>
                           <a:spcPts val="0"/>
@@ -22660,7 +22660,7 @@
                     <a:p>
                       <a:pPr algn="l">
                         <a:lnSpc>
-                          <a:spcPct val="82000"/>
+                          <a:spcPct val="90000"/>
                         </a:lnSpc>
                         <a:spcBef>
                           <a:spcPts val="0"/>
@@ -22693,7 +22693,7 @@
                     <a:p>
                       <a:pPr algn="l">
                         <a:lnSpc>
-                          <a:spcPct val="82000"/>
+                          <a:spcPct val="90000"/>
                         </a:lnSpc>
                         <a:spcBef>
                           <a:spcPts val="0"/>
@@ -22726,7 +22726,7 @@
                     <a:p>
                       <a:pPr algn="l">
                         <a:lnSpc>
-                          <a:spcPct val="82000"/>
+                          <a:spcPct val="90000"/>
                         </a:lnSpc>
                         <a:spcBef>
                           <a:spcPts val="0"/>
@@ -22759,7 +22759,7 @@
                     <a:p>
                       <a:pPr algn="l">
                         <a:lnSpc>
-                          <a:spcPct val="82000"/>
+                          <a:spcPct val="90000"/>
                         </a:lnSpc>
                         <a:spcBef>
                           <a:spcPts val="0"/>
@@ -22792,7 +22792,7 @@
                     <a:p>
                       <a:pPr algn="l">
                         <a:lnSpc>
-                          <a:spcPct val="82000"/>
+                          <a:spcPct val="90000"/>
                         </a:lnSpc>
                         <a:spcBef>
                           <a:spcPts val="0"/>
@@ -22825,7 +22825,7 @@
                     <a:p>
                       <a:pPr algn="l">
                         <a:lnSpc>
-                          <a:spcPct val="82000"/>
+                          <a:spcPct val="90000"/>
                         </a:lnSpc>
                         <a:spcBef>
                           <a:spcPts val="0"/>
@@ -22858,7 +22858,7 @@
                     <a:p>
                       <a:pPr algn="l">
                         <a:lnSpc>
-                          <a:spcPct val="82000"/>
+                          <a:spcPct val="90000"/>
                         </a:lnSpc>
                         <a:spcBef>
                           <a:spcPts val="0"/>
@@ -22885,338 +22885,6 @@
                   </a:tcPr>
                 </a:tc>
               </a:tr>
-              <a:tr h="192024">
-                <a:tc>
-                  <a:txBody>
-                    <a:bodyPr/>
-                    <a:lstStyle/>
-                    <a:p>
-                      <a:pPr algn="ctr">
-                        <a:lnSpc>
-                          <a:spcPct val="82000"/>
-                        </a:lnSpc>
-                        <a:spcBef>
-                          <a:spcPts val="0"/>
-                        </a:spcBef>
-                        <a:spcAft>
-                          <a:spcPts val="0"/>
-                        </a:spcAft>
-                      </a:pPr>
-                      <a:r>
-                        <a:rPr sz="900" b="0">
-                          <a:solidFill>
-                            <a:srgbClr val="1F1F1F"/>
-                          </a:solidFill>
-                          <a:latin typeface="KoPubWorld돋움체 Light"/>
-                        </a:rPr>
-                        <a:t>합계</a:t>
-                      </a:r>
-                    </a:p>
-                  </a:txBody>
-                  <a:tcPr marL="54864" marR="54864" marT="0" marB="0">
-                    <a:solidFill>
-                      <a:srgbClr val="F2F2F2"/>
-                    </a:solidFill>
-                  </a:tcPr>
-                </a:tc>
-                <a:tc>
-                  <a:txBody>
-                    <a:bodyPr/>
-                    <a:lstStyle/>
-                    <a:p>
-                      <a:pPr algn="l">
-                        <a:lnSpc>
-                          <a:spcPct val="82000"/>
-                        </a:lnSpc>
-                        <a:spcBef>
-                          <a:spcPts val="0"/>
-                        </a:spcBef>
-                        <a:spcAft>
-                          <a:spcPts val="0"/>
-                        </a:spcAft>
-                      </a:pPr>
-                      <a:r>
-                        <a:rPr sz="900" b="0">
-                          <a:solidFill>
-                            <a:srgbClr val="1F1F1F"/>
-                          </a:solidFill>
-                          <a:latin typeface="KoPubWorld돋움체 Light"/>
-                        </a:rPr>
-                        <a:t/>
-                      </a:r>
-                    </a:p>
-                  </a:txBody>
-                  <a:tcPr marL="54864" marR="54864" marT="0" marB="0">
-                    <a:solidFill>
-                      <a:srgbClr val="F2F2F2"/>
-                    </a:solidFill>
-                  </a:tcPr>
-                </a:tc>
-                <a:tc>
-                  <a:txBody>
-                    <a:bodyPr/>
-                    <a:lstStyle/>
-                    <a:p>
-                      <a:pPr algn="l">
-                        <a:lnSpc>
-                          <a:spcPct val="82000"/>
-                        </a:lnSpc>
-                        <a:spcBef>
-                          <a:spcPts val="0"/>
-                        </a:spcBef>
-                        <a:spcAft>
-                          <a:spcPts val="0"/>
-                        </a:spcAft>
-                      </a:pPr>
-                      <a:r>
-                        <a:rPr sz="900" b="0">
-                          <a:solidFill>
-                            <a:srgbClr val="1F1F1F"/>
-                          </a:solidFill>
-                          <a:latin typeface="KoPubWorld돋움체 Light"/>
-                        </a:rPr>
-                        <a:t>98,800</a:t>
-                      </a:r>
-                    </a:p>
-                  </a:txBody>
-                  <a:tcPr marL="54864" marR="54864" marT="0" marB="0">
-                    <a:solidFill>
-                      <a:srgbClr val="F2F2F2"/>
-                    </a:solidFill>
-                  </a:tcPr>
-                </a:tc>
-                <a:tc>
-                  <a:txBody>
-                    <a:bodyPr/>
-                    <a:lstStyle/>
-                    <a:p>
-                      <a:pPr algn="l">
-                        <a:lnSpc>
-                          <a:spcPct val="82000"/>
-                        </a:lnSpc>
-                        <a:spcBef>
-                          <a:spcPts val="0"/>
-                        </a:spcBef>
-                        <a:spcAft>
-                          <a:spcPts val="0"/>
-                        </a:spcAft>
-                      </a:pPr>
-                      <a:r>
-                        <a:rPr sz="900" b="0">
-                          <a:solidFill>
-                            <a:srgbClr val="1F1F1F"/>
-                          </a:solidFill>
-                          <a:latin typeface="KoPubWorld돋움체 Light"/>
-                        </a:rPr>
-                        <a:t/>
-                      </a:r>
-                    </a:p>
-                  </a:txBody>
-                  <a:tcPr marL="54864" marR="54864" marT="0" marB="0">
-                    <a:solidFill>
-                      <a:srgbClr val="F2F2F2"/>
-                    </a:solidFill>
-                  </a:tcPr>
-                </a:tc>
-                <a:tc>
-                  <a:txBody>
-                    <a:bodyPr/>
-                    <a:lstStyle/>
-                    <a:p>
-                      <a:pPr algn="l">
-                        <a:lnSpc>
-                          <a:spcPct val="82000"/>
-                        </a:lnSpc>
-                        <a:spcBef>
-                          <a:spcPts val="0"/>
-                        </a:spcBef>
-                        <a:spcAft>
-                          <a:spcPts val="0"/>
-                        </a:spcAft>
-                      </a:pPr>
-                      <a:r>
-                        <a:rPr sz="900" b="0">
-                          <a:solidFill>
-                            <a:srgbClr val="1F1F1F"/>
-                          </a:solidFill>
-                          <a:latin typeface="KoPubWorld돋움체 Light"/>
-                        </a:rPr>
-                        <a:t>6,355</a:t>
-                      </a:r>
-                    </a:p>
-                  </a:txBody>
-                  <a:tcPr marL="54864" marR="54864" marT="0" marB="0">
-                    <a:solidFill>
-                      <a:srgbClr val="F2F2F2"/>
-                    </a:solidFill>
-                  </a:tcPr>
-                </a:tc>
-                <a:tc>
-                  <a:txBody>
-                    <a:bodyPr/>
-                    <a:lstStyle/>
-                    <a:p>
-                      <a:pPr algn="l">
-                        <a:lnSpc>
-                          <a:spcPct val="82000"/>
-                        </a:lnSpc>
-                        <a:spcBef>
-                          <a:spcPts val="0"/>
-                        </a:spcBef>
-                        <a:spcAft>
-                          <a:spcPts val="0"/>
-                        </a:spcAft>
-                      </a:pPr>
-                      <a:r>
-                        <a:rPr sz="900" b="0">
-                          <a:solidFill>
-                            <a:srgbClr val="1F1F1F"/>
-                          </a:solidFill>
-                          <a:latin typeface="KoPubWorld돋움체 Light"/>
-                        </a:rPr>
-                        <a:t>92,445</a:t>
-                      </a:r>
-                    </a:p>
-                  </a:txBody>
-                  <a:tcPr marL="54864" marR="54864" marT="0" marB="0">
-                    <a:solidFill>
-                      <a:srgbClr val="F2F2F2"/>
-                    </a:solidFill>
-                  </a:tcPr>
-                </a:tc>
-                <a:tc>
-                  <a:txBody>
-                    <a:bodyPr/>
-                    <a:lstStyle/>
-                    <a:p>
-                      <a:pPr algn="l">
-                        <a:lnSpc>
-                          <a:spcPct val="82000"/>
-                        </a:lnSpc>
-                        <a:spcBef>
-                          <a:spcPts val="0"/>
-                        </a:spcBef>
-                        <a:spcAft>
-                          <a:spcPts val="0"/>
-                        </a:spcAft>
-                      </a:pPr>
-                      <a:r>
-                        <a:rPr sz="900" b="0">
-                          <a:solidFill>
-                            <a:srgbClr val="1F1F1F"/>
-                          </a:solidFill>
-                          <a:latin typeface="KoPubWorld돋움체 Light"/>
-                        </a:rPr>
-                        <a:t>6,354,783</a:t>
-                      </a:r>
-                    </a:p>
-                  </a:txBody>
-                  <a:tcPr marL="54864" marR="54864" marT="0" marB="0">
-                    <a:solidFill>
-                      <a:srgbClr val="F2F2F2"/>
-                    </a:solidFill>
-                  </a:tcPr>
-                </a:tc>
-                <a:tc>
-                  <a:txBody>
-                    <a:bodyPr/>
-                    <a:lstStyle/>
-                    <a:p>
-                      <a:pPr algn="l">
-                        <a:lnSpc>
-                          <a:spcPct val="82000"/>
-                        </a:lnSpc>
-                        <a:spcBef>
-                          <a:spcPts val="0"/>
-                        </a:spcBef>
-                        <a:spcAft>
-                          <a:spcPts val="0"/>
-                        </a:spcAft>
-                      </a:pPr>
-                      <a:r>
-                        <a:rPr sz="900" b="0">
-                          <a:solidFill>
-                            <a:srgbClr val="1F1F1F"/>
-                          </a:solidFill>
-                          <a:latin typeface="KoPubWorld돋움체 Light"/>
-                        </a:rPr>
-                        <a:t>100.0%</a:t>
-                      </a:r>
-                    </a:p>
-                  </a:txBody>
-                  <a:tcPr marL="54864" marR="54864" marT="0" marB="0">
-                    <a:solidFill>
-                      <a:srgbClr val="F2F2F2"/>
-                    </a:solidFill>
-                  </a:tcPr>
-                </a:tc>
-                <a:tc>
-                  <a:txBody>
-                    <a:bodyPr/>
-                    <a:lstStyle/>
-                    <a:p>
-                      <a:pPr algn="l">
-                        <a:lnSpc>
-                          <a:spcPct val="82000"/>
-                        </a:lnSpc>
-                        <a:spcBef>
-                          <a:spcPts val="0"/>
-                        </a:spcBef>
-                        <a:spcAft>
-                          <a:spcPts val="0"/>
-                        </a:spcAft>
-                      </a:pPr>
-                      <a:r>
-                        <a:rPr sz="900" b="0">
-                          <a:solidFill>
-                            <a:srgbClr val="1F1F1F"/>
-                          </a:solidFill>
-                          <a:latin typeface="KoPubWorld돋움체 Light"/>
-                        </a:rPr>
-                        <a:t>5,040,000</a:t>
-                      </a:r>
-                    </a:p>
-                  </a:txBody>
-                  <a:tcPr marL="54864" marR="54864" marT="0" marB="0">
-                    <a:solidFill>
-                      <a:srgbClr val="F2F2F2"/>
-                    </a:solidFill>
-                  </a:tcPr>
-                </a:tc>
-                <a:tc>
-                  <a:txBody>
-                    <a:bodyPr/>
-                    <a:lstStyle/>
-                    <a:p>
-                      <a:pPr algn="l">
-                        <a:lnSpc>
-                          <a:spcPct val="82000"/>
-                        </a:lnSpc>
-                        <a:spcBef>
-                          <a:spcPts val="0"/>
-                        </a:spcBef>
-                        <a:spcAft>
-                          <a:spcPts val="0"/>
-                        </a:spcAft>
-                      </a:pPr>
-                      <a:r>
-                        <a:rPr sz="900" b="0">
-                          <a:solidFill>
-                            <a:srgbClr val="1F1F1F"/>
-                          </a:solidFill>
-                          <a:latin typeface="KoPubWorld돋움체 Light"/>
-                        </a:rPr>
-                        <a:t>100.0%</a:t>
-                      </a:r>
-                    </a:p>
-                  </a:txBody>
-                  <a:tcPr marL="54864" marR="54864" marT="0" marB="0">
-                    <a:solidFill>
-                      <a:srgbClr val="F2F2F2"/>
-                    </a:solidFill>
-                  </a:tcPr>
-                </a:tc>
-              </a:tr>
             </a:tbl>
           </a:graphicData>
         </a:graphic>
@@ -23229,7 +22897,7 @@
         </p:nvSpPr>
         <p:spPr>
           <a:xfrm>
-            <a:off x="457200" y="3890772"/>
+            <a:off x="457200" y="3721608"/>
             <a:ext cx="9784080" cy="246888"/>
           </a:xfrm>
           <a:prstGeom prst="rect">
@@ -23283,8 +22951,8 @@
           <p:nvPr/>
         </p:nvGraphicFramePr>
         <p:xfrm>
-          <a:off x="521207" y="4219956"/>
-          <a:ext cx="9966960" cy="2304288"/>
+          <a:off x="521207" y="4050792"/>
+          <a:ext cx="9966960" cy="2112264"/>
         </p:xfrm>
         <a:graphic>
           <a:graphicData uri="http://schemas.openxmlformats.org/drawingml/2006/table">
@@ -23311,7 +22979,7 @@
                     <a:p>
                       <a:pPr algn="ctr">
                         <a:lnSpc>
-                          <a:spcPct val="82000"/>
+                          <a:spcPct val="90000"/>
                         </a:lnSpc>
                         <a:spcBef>
                           <a:spcPts val="0"/>
@@ -23344,7 +23012,7 @@
                     <a:p>
                       <a:pPr algn="ctr">
                         <a:lnSpc>
-                          <a:spcPct val="82000"/>
+                          <a:spcPct val="90000"/>
                         </a:lnSpc>
                         <a:spcBef>
                           <a:spcPts val="0"/>
@@ -23377,7 +23045,7 @@
                     <a:p>
                       <a:pPr algn="ctr">
                         <a:lnSpc>
-                          <a:spcPct val="82000"/>
+                          <a:spcPct val="90000"/>
                         </a:lnSpc>
                         <a:spcBef>
                           <a:spcPts val="0"/>
@@ -23410,7 +23078,7 @@
                     <a:p>
                       <a:pPr algn="ctr">
                         <a:lnSpc>
-                          <a:spcPct val="82000"/>
+                          <a:spcPct val="90000"/>
                         </a:lnSpc>
                         <a:spcBef>
                           <a:spcPts val="0"/>
@@ -23443,7 +23111,7 @@
                     <a:p>
                       <a:pPr algn="ctr">
                         <a:lnSpc>
-                          <a:spcPct val="82000"/>
+                          <a:spcPct val="90000"/>
                         </a:lnSpc>
                         <a:spcBef>
                           <a:spcPts val="0"/>
@@ -23476,7 +23144,7 @@
                     <a:p>
                       <a:pPr algn="ctr">
                         <a:lnSpc>
-                          <a:spcPct val="82000"/>
+                          <a:spcPct val="90000"/>
                         </a:lnSpc>
                         <a:spcBef>
                           <a:spcPts val="0"/>
@@ -23509,7 +23177,7 @@
                     <a:p>
                       <a:pPr algn="ctr">
                         <a:lnSpc>
-                          <a:spcPct val="82000"/>
+                          <a:spcPct val="90000"/>
                         </a:lnSpc>
                         <a:spcBef>
                           <a:spcPts val="0"/>
@@ -23542,7 +23210,7 @@
                     <a:p>
                       <a:pPr algn="ctr">
                         <a:lnSpc>
-                          <a:spcPct val="82000"/>
+                          <a:spcPct val="90000"/>
                         </a:lnSpc>
                         <a:spcBef>
                           <a:spcPts val="0"/>
@@ -23575,7 +23243,7 @@
                     <a:p>
                       <a:pPr algn="ctr">
                         <a:lnSpc>
-                          <a:spcPct val="82000"/>
+                          <a:spcPct val="90000"/>
                         </a:lnSpc>
                         <a:spcBef>
                           <a:spcPts val="0"/>
@@ -23610,7 +23278,7 @@
                     <a:p>
                       <a:pPr algn="ctr">
                         <a:lnSpc>
-                          <a:spcPct val="82000"/>
+                          <a:spcPct val="90000"/>
                         </a:lnSpc>
                         <a:spcBef>
                           <a:spcPts val="0"/>
@@ -23643,7 +23311,7 @@
                     <a:p>
                       <a:pPr algn="l">
                         <a:lnSpc>
-                          <a:spcPct val="82000"/>
+                          <a:spcPct val="90000"/>
                         </a:lnSpc>
                         <a:spcBef>
                           <a:spcPts val="0"/>
@@ -23676,7 +23344,7 @@
                     <a:p>
                       <a:pPr algn="l">
                         <a:lnSpc>
-                          <a:spcPct val="82000"/>
+                          <a:spcPct val="90000"/>
                         </a:lnSpc>
                         <a:spcBef>
                           <a:spcPts val="0"/>
@@ -23709,7 +23377,7 @@
                     <a:p>
                       <a:pPr algn="l">
                         <a:lnSpc>
-                          <a:spcPct val="82000"/>
+                          <a:spcPct val="90000"/>
                         </a:lnSpc>
                         <a:spcBef>
                           <a:spcPts val="0"/>
@@ -23742,7 +23410,7 @@
                     <a:p>
                       <a:pPr algn="l">
                         <a:lnSpc>
-                          <a:spcPct val="82000"/>
+                          <a:spcPct val="90000"/>
                         </a:lnSpc>
                         <a:spcBef>
                           <a:spcPts val="0"/>
@@ -23775,7 +23443,7 @@
                     <a:p>
                       <a:pPr algn="l">
                         <a:lnSpc>
-                          <a:spcPct val="82000"/>
+                          <a:spcPct val="90000"/>
                         </a:lnSpc>
                         <a:spcBef>
                           <a:spcPts val="0"/>
@@ -23808,7 +23476,7 @@
                     <a:p>
                       <a:pPr algn="l">
                         <a:lnSpc>
-                          <a:spcPct val="82000"/>
+                          <a:spcPct val="90000"/>
                         </a:lnSpc>
                         <a:spcBef>
                           <a:spcPts val="0"/>
@@ -23841,7 +23509,7 @@
                     <a:p>
                       <a:pPr algn="l">
                         <a:lnSpc>
-                          <a:spcPct val="82000"/>
+                          <a:spcPct val="90000"/>
                         </a:lnSpc>
                         <a:spcBef>
                           <a:spcPts val="0"/>
@@ -23874,7 +23542,7 @@
                     <a:p>
                       <a:pPr algn="l">
                         <a:lnSpc>
-                          <a:spcPct val="82000"/>
+                          <a:spcPct val="90000"/>
                         </a:lnSpc>
                         <a:spcBef>
                           <a:spcPts val="0"/>
@@ -23909,7 +23577,7 @@
                     <a:p>
                       <a:pPr algn="ctr">
                         <a:lnSpc>
-                          <a:spcPct val="82000"/>
+                          <a:spcPct val="90000"/>
                         </a:lnSpc>
                         <a:spcBef>
                           <a:spcPts val="0"/>
@@ -23942,7 +23610,7 @@
                     <a:p>
                       <a:pPr algn="l">
                         <a:lnSpc>
-                          <a:spcPct val="82000"/>
+                          <a:spcPct val="90000"/>
                         </a:lnSpc>
                         <a:spcBef>
                           <a:spcPts val="0"/>
@@ -23975,7 +23643,7 @@
                     <a:p>
                       <a:pPr algn="l">
                         <a:lnSpc>
-                          <a:spcPct val="82000"/>
+                          <a:spcPct val="90000"/>
                         </a:lnSpc>
                         <a:spcBef>
                           <a:spcPts val="0"/>
@@ -24008,7 +23676,7 @@
                     <a:p>
                       <a:pPr algn="l">
                         <a:lnSpc>
-                          <a:spcPct val="82000"/>
+                          <a:spcPct val="90000"/>
                         </a:lnSpc>
                         <a:spcBef>
                           <a:spcPts val="0"/>
@@ -24041,7 +23709,7 @@
                     <a:p>
                       <a:pPr algn="l">
                         <a:lnSpc>
-                          <a:spcPct val="82000"/>
+                          <a:spcPct val="90000"/>
                         </a:lnSpc>
                         <a:spcBef>
                           <a:spcPts val="0"/>
@@ -24074,7 +23742,7 @@
                     <a:p>
                       <a:pPr algn="l">
                         <a:lnSpc>
-                          <a:spcPct val="82000"/>
+                          <a:spcPct val="90000"/>
                         </a:lnSpc>
                         <a:spcBef>
                           <a:spcPts val="0"/>
@@ -24107,7 +23775,7 @@
                     <a:p>
                       <a:pPr algn="l">
                         <a:lnSpc>
-                          <a:spcPct val="82000"/>
+                          <a:spcPct val="90000"/>
                         </a:lnSpc>
                         <a:spcBef>
                           <a:spcPts val="0"/>
@@ -24140,7 +23808,7 @@
                     <a:p>
                       <a:pPr algn="l">
                         <a:lnSpc>
-                          <a:spcPct val="82000"/>
+                          <a:spcPct val="90000"/>
                         </a:lnSpc>
                         <a:spcBef>
                           <a:spcPts val="0"/>
@@ -24173,7 +23841,7 @@
                     <a:p>
                       <a:pPr algn="l">
                         <a:lnSpc>
-                          <a:spcPct val="82000"/>
+                          <a:spcPct val="90000"/>
                         </a:lnSpc>
                         <a:spcBef>
                           <a:spcPts val="0"/>
@@ -24208,7 +23876,7 @@
                     <a:p>
                       <a:pPr algn="ctr">
                         <a:lnSpc>
-                          <a:spcPct val="82000"/>
+                          <a:spcPct val="90000"/>
                         </a:lnSpc>
                         <a:spcBef>
                           <a:spcPts val="0"/>
@@ -24241,7 +23909,7 @@
                     <a:p>
                       <a:pPr algn="l">
                         <a:lnSpc>
-                          <a:spcPct val="82000"/>
+                          <a:spcPct val="90000"/>
                         </a:lnSpc>
                         <a:spcBef>
                           <a:spcPts val="0"/>
@@ -24274,7 +23942,7 @@
                     <a:p>
                       <a:pPr algn="l">
                         <a:lnSpc>
-                          <a:spcPct val="82000"/>
+                          <a:spcPct val="90000"/>
                         </a:lnSpc>
                         <a:spcBef>
                           <a:spcPts val="0"/>
@@ -24307,7 +23975,7 @@
                     <a:p>
                       <a:pPr algn="l">
                         <a:lnSpc>
-                          <a:spcPct val="82000"/>
+                          <a:spcPct val="90000"/>
                         </a:lnSpc>
                         <a:spcBef>
                           <a:spcPts val="0"/>
@@ -24340,7 +24008,7 @@
                     <a:p>
                       <a:pPr algn="l">
                         <a:lnSpc>
-                          <a:spcPct val="82000"/>
+                          <a:spcPct val="90000"/>
                         </a:lnSpc>
                         <a:spcBef>
                           <a:spcPts val="0"/>
@@ -24373,7 +24041,7 @@
                     <a:p>
                       <a:pPr algn="l">
                         <a:lnSpc>
-                          <a:spcPct val="82000"/>
+                          <a:spcPct val="90000"/>
                         </a:lnSpc>
                         <a:spcBef>
                           <a:spcPts val="0"/>
@@ -24406,7 +24074,7 @@
                     <a:p>
                       <a:pPr algn="l">
                         <a:lnSpc>
-                          <a:spcPct val="82000"/>
+                          <a:spcPct val="90000"/>
                         </a:lnSpc>
                         <a:spcBef>
                           <a:spcPts val="0"/>
@@ -24439,7 +24107,7 @@
                     <a:p>
                       <a:pPr algn="l">
                         <a:lnSpc>
-                          <a:spcPct val="82000"/>
+                          <a:spcPct val="90000"/>
                         </a:lnSpc>
                         <a:spcBef>
                           <a:spcPts val="0"/>
@@ -24472,7 +24140,7 @@
                     <a:p>
                       <a:pPr algn="l">
                         <a:lnSpc>
-                          <a:spcPct val="82000"/>
+                          <a:spcPct val="90000"/>
                         </a:lnSpc>
                         <a:spcBef>
                           <a:spcPts val="0"/>
@@ -24507,7 +24175,7 @@
                     <a:p>
                       <a:pPr algn="ctr">
                         <a:lnSpc>
-                          <a:spcPct val="82000"/>
+                          <a:spcPct val="90000"/>
                         </a:lnSpc>
                         <a:spcBef>
                           <a:spcPts val="0"/>
@@ -24540,7 +24208,7 @@
                     <a:p>
                       <a:pPr algn="l">
                         <a:lnSpc>
-                          <a:spcPct val="82000"/>
+                          <a:spcPct val="90000"/>
                         </a:lnSpc>
                         <a:spcBef>
                           <a:spcPts val="0"/>
@@ -24573,7 +24241,7 @@
                     <a:p>
                       <a:pPr algn="l">
                         <a:lnSpc>
-                          <a:spcPct val="82000"/>
+                          <a:spcPct val="90000"/>
                         </a:lnSpc>
                         <a:spcBef>
                           <a:spcPts val="0"/>
@@ -24606,7 +24274,7 @@
                     <a:p>
                       <a:pPr algn="l">
                         <a:lnSpc>
-                          <a:spcPct val="82000"/>
+                          <a:spcPct val="90000"/>
                         </a:lnSpc>
                         <a:spcBef>
                           <a:spcPts val="0"/>
@@ -24639,7 +24307,7 @@
                     <a:p>
                       <a:pPr algn="l">
                         <a:lnSpc>
-                          <a:spcPct val="82000"/>
+                          <a:spcPct val="90000"/>
                         </a:lnSpc>
                         <a:spcBef>
                           <a:spcPts val="0"/>
@@ -24672,7 +24340,7 @@
                     <a:p>
                       <a:pPr algn="l">
                         <a:lnSpc>
-                          <a:spcPct val="82000"/>
+                          <a:spcPct val="90000"/>
                         </a:lnSpc>
                         <a:spcBef>
                           <a:spcPts val="0"/>
@@ -24705,7 +24373,7 @@
                     <a:p>
                       <a:pPr algn="l">
                         <a:lnSpc>
-                          <a:spcPct val="82000"/>
+                          <a:spcPct val="90000"/>
                         </a:lnSpc>
                         <a:spcBef>
                           <a:spcPts val="0"/>
@@ -24738,7 +24406,7 @@
                     <a:p>
                       <a:pPr algn="l">
                         <a:lnSpc>
-                          <a:spcPct val="82000"/>
+                          <a:spcPct val="90000"/>
                         </a:lnSpc>
                         <a:spcBef>
                           <a:spcPts val="0"/>
@@ -24771,7 +24439,7 @@
                     <a:p>
                       <a:pPr algn="l">
                         <a:lnSpc>
-                          <a:spcPct val="82000"/>
+                          <a:spcPct val="90000"/>
                         </a:lnSpc>
                         <a:spcBef>
                           <a:spcPts val="0"/>
@@ -24806,7 +24474,7 @@
                     <a:p>
                       <a:pPr algn="ctr">
                         <a:lnSpc>
-                          <a:spcPct val="82000"/>
+                          <a:spcPct val="90000"/>
                         </a:lnSpc>
                         <a:spcBef>
                           <a:spcPts val="0"/>
@@ -24839,7 +24507,7 @@
                     <a:p>
                       <a:pPr algn="l">
                         <a:lnSpc>
-                          <a:spcPct val="82000"/>
+                          <a:spcPct val="90000"/>
                         </a:lnSpc>
                         <a:spcBef>
                           <a:spcPts val="0"/>
@@ -24872,7 +24540,7 @@
                     <a:p>
                       <a:pPr algn="l">
                         <a:lnSpc>
-                          <a:spcPct val="82000"/>
+                          <a:spcPct val="90000"/>
                         </a:lnSpc>
                         <a:spcBef>
                           <a:spcPts val="0"/>
@@ -24905,7 +24573,7 @@
                     <a:p>
                       <a:pPr algn="l">
                         <a:lnSpc>
-                          <a:spcPct val="82000"/>
+                          <a:spcPct val="90000"/>
                         </a:lnSpc>
                         <a:spcBef>
                           <a:spcPts val="0"/>
@@ -24938,7 +24606,7 @@
                     <a:p>
                       <a:pPr algn="l">
                         <a:lnSpc>
-                          <a:spcPct val="82000"/>
+                          <a:spcPct val="90000"/>
                         </a:lnSpc>
                         <a:spcBef>
                           <a:spcPts val="0"/>
@@ -24971,7 +24639,7 @@
                     <a:p>
                       <a:pPr algn="l">
                         <a:lnSpc>
-                          <a:spcPct val="82000"/>
+                          <a:spcPct val="90000"/>
                         </a:lnSpc>
                         <a:spcBef>
                           <a:spcPts val="0"/>
@@ -25004,7 +24672,7 @@
                     <a:p>
                       <a:pPr algn="l">
                         <a:lnSpc>
-                          <a:spcPct val="82000"/>
+                          <a:spcPct val="90000"/>
                         </a:lnSpc>
                         <a:spcBef>
                           <a:spcPts val="0"/>
@@ -25037,7 +24705,7 @@
                     <a:p>
                       <a:pPr algn="l">
                         <a:lnSpc>
-                          <a:spcPct val="82000"/>
+                          <a:spcPct val="90000"/>
                         </a:lnSpc>
                         <a:spcBef>
                           <a:spcPts val="0"/>
@@ -25070,7 +24738,7 @@
                     <a:p>
                       <a:pPr algn="l">
                         <a:lnSpc>
-                          <a:spcPct val="82000"/>
+                          <a:spcPct val="90000"/>
                         </a:lnSpc>
                         <a:spcBef>
                           <a:spcPts val="0"/>
@@ -25105,7 +24773,7 @@
                     <a:p>
                       <a:pPr algn="ctr">
                         <a:lnSpc>
-                          <a:spcPct val="82000"/>
+                          <a:spcPct val="90000"/>
                         </a:lnSpc>
                         <a:spcBef>
                           <a:spcPts val="0"/>
@@ -25138,7 +24806,7 @@
                     <a:p>
                       <a:pPr algn="l">
                         <a:lnSpc>
-                          <a:spcPct val="82000"/>
+                          <a:spcPct val="90000"/>
                         </a:lnSpc>
                         <a:spcBef>
                           <a:spcPts val="0"/>
@@ -25171,7 +24839,7 @@
                     <a:p>
                       <a:pPr algn="l">
                         <a:lnSpc>
-                          <a:spcPct val="82000"/>
+                          <a:spcPct val="90000"/>
                         </a:lnSpc>
                         <a:spcBef>
                           <a:spcPts val="0"/>
@@ -25204,7 +24872,7 @@
                     <a:p>
                       <a:pPr algn="l">
                         <a:lnSpc>
-                          <a:spcPct val="82000"/>
+                          <a:spcPct val="90000"/>
                         </a:lnSpc>
                         <a:spcBef>
                           <a:spcPts val="0"/>
@@ -25237,7 +24905,7 @@
                     <a:p>
                       <a:pPr algn="l">
                         <a:lnSpc>
-                          <a:spcPct val="82000"/>
+                          <a:spcPct val="90000"/>
                         </a:lnSpc>
                         <a:spcBef>
                           <a:spcPts val="0"/>
@@ -25270,7 +24938,7 @@
                     <a:p>
                       <a:pPr algn="l">
                         <a:lnSpc>
-                          <a:spcPct val="82000"/>
+                          <a:spcPct val="90000"/>
                         </a:lnSpc>
                         <a:spcBef>
                           <a:spcPts val="0"/>
@@ -25303,7 +24971,7 @@
                     <a:p>
                       <a:pPr algn="l">
                         <a:lnSpc>
-                          <a:spcPct val="82000"/>
+                          <a:spcPct val="90000"/>
                         </a:lnSpc>
                         <a:spcBef>
                           <a:spcPts val="0"/>
@@ -25336,7 +25004,7 @@
                     <a:p>
                       <a:pPr algn="l">
                         <a:lnSpc>
-                          <a:spcPct val="82000"/>
+                          <a:spcPct val="90000"/>
                         </a:lnSpc>
                         <a:spcBef>
                           <a:spcPts val="0"/>
@@ -25369,7 +25037,7 @@
                     <a:p>
                       <a:pPr algn="l">
                         <a:lnSpc>
-                          <a:spcPct val="82000"/>
+                          <a:spcPct val="90000"/>
                         </a:lnSpc>
                         <a:spcBef>
                           <a:spcPts val="0"/>
@@ -25404,7 +25072,7 @@
                     <a:p>
                       <a:pPr algn="ctr">
                         <a:lnSpc>
-                          <a:spcPct val="82000"/>
+                          <a:spcPct val="90000"/>
                         </a:lnSpc>
                         <a:spcBef>
                           <a:spcPts val="0"/>
@@ -25437,7 +25105,7 @@
                     <a:p>
                       <a:pPr algn="l">
                         <a:lnSpc>
-                          <a:spcPct val="82000"/>
+                          <a:spcPct val="90000"/>
                         </a:lnSpc>
                         <a:spcBef>
                           <a:spcPts val="0"/>
@@ -25470,7 +25138,7 @@
                     <a:p>
                       <a:pPr algn="l">
                         <a:lnSpc>
-                          <a:spcPct val="82000"/>
+                          <a:spcPct val="90000"/>
                         </a:lnSpc>
                         <a:spcBef>
                           <a:spcPts val="0"/>
@@ -25503,7 +25171,7 @@
                     <a:p>
                       <a:pPr algn="l">
                         <a:lnSpc>
-                          <a:spcPct val="82000"/>
+                          <a:spcPct val="90000"/>
                         </a:lnSpc>
                         <a:spcBef>
                           <a:spcPts val="0"/>
@@ -25536,7 +25204,7 @@
                     <a:p>
                       <a:pPr algn="l">
                         <a:lnSpc>
-                          <a:spcPct val="82000"/>
+                          <a:spcPct val="90000"/>
                         </a:lnSpc>
                         <a:spcBef>
                           <a:spcPts val="0"/>
@@ -25569,7 +25237,7 @@
                     <a:p>
                       <a:pPr algn="l">
                         <a:lnSpc>
-                          <a:spcPct val="82000"/>
+                          <a:spcPct val="90000"/>
                         </a:lnSpc>
                         <a:spcBef>
                           <a:spcPts val="0"/>
@@ -25602,7 +25270,7 @@
                     <a:p>
                       <a:pPr algn="l">
                         <a:lnSpc>
-                          <a:spcPct val="82000"/>
+                          <a:spcPct val="90000"/>
                         </a:lnSpc>
                         <a:spcBef>
                           <a:spcPts val="0"/>
@@ -25635,7 +25303,7 @@
                     <a:p>
                       <a:pPr algn="l">
                         <a:lnSpc>
-                          <a:spcPct val="82000"/>
+                          <a:spcPct val="90000"/>
                         </a:lnSpc>
                         <a:spcBef>
                           <a:spcPts val="0"/>
@@ -25668,7 +25336,7 @@
                     <a:p>
                       <a:pPr algn="l">
                         <a:lnSpc>
-                          <a:spcPct val="82000"/>
+                          <a:spcPct val="90000"/>
                         </a:lnSpc>
                         <a:spcBef>
                           <a:spcPts val="0"/>
@@ -25703,7 +25371,7 @@
                     <a:p>
                       <a:pPr algn="ctr">
                         <a:lnSpc>
-                          <a:spcPct val="82000"/>
+                          <a:spcPct val="90000"/>
                         </a:lnSpc>
                         <a:spcBef>
                           <a:spcPts val="0"/>
@@ -25736,7 +25404,7 @@
                     <a:p>
                       <a:pPr algn="l">
                         <a:lnSpc>
-                          <a:spcPct val="82000"/>
+                          <a:spcPct val="90000"/>
                         </a:lnSpc>
                         <a:spcBef>
                           <a:spcPts val="0"/>
@@ -25769,7 +25437,7 @@
                     <a:p>
                       <a:pPr algn="l">
                         <a:lnSpc>
-                          <a:spcPct val="82000"/>
+                          <a:spcPct val="90000"/>
                         </a:lnSpc>
                         <a:spcBef>
                           <a:spcPts val="0"/>
@@ -25802,7 +25470,7 @@
                     <a:p>
                       <a:pPr algn="l">
                         <a:lnSpc>
-                          <a:spcPct val="82000"/>
+                          <a:spcPct val="90000"/>
                         </a:lnSpc>
                         <a:spcBef>
                           <a:spcPts val="0"/>
@@ -25835,7 +25503,7 @@
                     <a:p>
                       <a:pPr algn="l">
                         <a:lnSpc>
-                          <a:spcPct val="82000"/>
+                          <a:spcPct val="90000"/>
                         </a:lnSpc>
                         <a:spcBef>
                           <a:spcPts val="0"/>
@@ -25868,7 +25536,7 @@
                     <a:p>
                       <a:pPr algn="l">
                         <a:lnSpc>
-                          <a:spcPct val="82000"/>
+                          <a:spcPct val="90000"/>
                         </a:lnSpc>
                         <a:spcBef>
                           <a:spcPts val="0"/>
@@ -25901,7 +25569,7 @@
                     <a:p>
                       <a:pPr algn="l">
                         <a:lnSpc>
-                          <a:spcPct val="82000"/>
+                          <a:spcPct val="90000"/>
                         </a:lnSpc>
                         <a:spcBef>
                           <a:spcPts val="0"/>
@@ -25934,7 +25602,7 @@
                     <a:p>
                       <a:pPr algn="l">
                         <a:lnSpc>
-                          <a:spcPct val="82000"/>
+                          <a:spcPct val="90000"/>
                         </a:lnSpc>
                         <a:spcBef>
                           <a:spcPts val="0"/>
@@ -25967,7 +25635,7 @@
                     <a:p>
                       <a:pPr algn="l">
                         <a:lnSpc>
-                          <a:spcPct val="82000"/>
+                          <a:spcPct val="90000"/>
                         </a:lnSpc>
                         <a:spcBef>
                           <a:spcPts val="0"/>
@@ -26002,7 +25670,7 @@
                     <a:p>
                       <a:pPr algn="ctr">
                         <a:lnSpc>
-                          <a:spcPct val="82000"/>
+                          <a:spcPct val="90000"/>
                         </a:lnSpc>
                         <a:spcBef>
                           <a:spcPts val="0"/>
@@ -26035,7 +25703,7 @@
                     <a:p>
                       <a:pPr algn="l">
                         <a:lnSpc>
-                          <a:spcPct val="82000"/>
+                          <a:spcPct val="90000"/>
                         </a:lnSpc>
                         <a:spcBef>
                           <a:spcPts val="0"/>
@@ -26068,7 +25736,7 @@
                     <a:p>
                       <a:pPr algn="l">
                         <a:lnSpc>
-                          <a:spcPct val="82000"/>
+                          <a:spcPct val="90000"/>
                         </a:lnSpc>
                         <a:spcBef>
                           <a:spcPts val="0"/>
@@ -26101,7 +25769,7 @@
                     <a:p>
                       <a:pPr algn="l">
                         <a:lnSpc>
-                          <a:spcPct val="82000"/>
+                          <a:spcPct val="90000"/>
                         </a:lnSpc>
                         <a:spcBef>
                           <a:spcPts val="0"/>
@@ -26134,7 +25802,7 @@
                     <a:p>
                       <a:pPr algn="l">
                         <a:lnSpc>
-                          <a:spcPct val="82000"/>
+                          <a:spcPct val="90000"/>
                         </a:lnSpc>
                         <a:spcBef>
                           <a:spcPts val="0"/>
@@ -26167,7 +25835,7 @@
                     <a:p>
                       <a:pPr algn="l">
                         <a:lnSpc>
-                          <a:spcPct val="82000"/>
+                          <a:spcPct val="90000"/>
                         </a:lnSpc>
                         <a:spcBef>
                           <a:spcPts val="0"/>
@@ -26200,7 +25868,7 @@
                     <a:p>
                       <a:pPr algn="l">
                         <a:lnSpc>
-                          <a:spcPct val="82000"/>
+                          <a:spcPct val="90000"/>
                         </a:lnSpc>
                         <a:spcBef>
                           <a:spcPts val="0"/>
@@ -26233,7 +25901,7 @@
                     <a:p>
                       <a:pPr algn="l">
                         <a:lnSpc>
-                          <a:spcPct val="82000"/>
+                          <a:spcPct val="90000"/>
                         </a:lnSpc>
                         <a:spcBef>
                           <a:spcPts val="0"/>
@@ -26266,7 +25934,7 @@
                     <a:p>
                       <a:pPr algn="l">
                         <a:lnSpc>
-                          <a:spcPct val="82000"/>
+                          <a:spcPct val="90000"/>
                         </a:lnSpc>
                         <a:spcBef>
                           <a:spcPts val="0"/>
@@ -26301,7 +25969,7 @@
                     <a:p>
                       <a:pPr algn="ctr">
                         <a:lnSpc>
-                          <a:spcPct val="82000"/>
+                          <a:spcPct val="90000"/>
                         </a:lnSpc>
                         <a:spcBef>
                           <a:spcPts val="0"/>
@@ -26334,7 +26002,7 @@
                     <a:p>
                       <a:pPr algn="l">
                         <a:lnSpc>
-                          <a:spcPct val="82000"/>
+                          <a:spcPct val="90000"/>
                         </a:lnSpc>
                         <a:spcBef>
                           <a:spcPts val="0"/>
@@ -26367,7 +26035,7 @@
                     <a:p>
                       <a:pPr algn="l">
                         <a:lnSpc>
-                          <a:spcPct val="82000"/>
+                          <a:spcPct val="90000"/>
                         </a:lnSpc>
                         <a:spcBef>
                           <a:spcPts val="0"/>
@@ -26400,7 +26068,7 @@
                     <a:p>
                       <a:pPr algn="l">
                         <a:lnSpc>
-                          <a:spcPct val="82000"/>
+                          <a:spcPct val="90000"/>
                         </a:lnSpc>
                         <a:spcBef>
                           <a:spcPts val="0"/>
@@ -26433,7 +26101,7 @@
                     <a:p>
                       <a:pPr algn="l">
                         <a:lnSpc>
-                          <a:spcPct val="82000"/>
+                          <a:spcPct val="90000"/>
                         </a:lnSpc>
                         <a:spcBef>
                           <a:spcPts val="0"/>
@@ -26466,7 +26134,7 @@
                     <a:p>
                       <a:pPr algn="l">
                         <a:lnSpc>
-                          <a:spcPct val="82000"/>
+                          <a:spcPct val="90000"/>
                         </a:lnSpc>
                         <a:spcBef>
                           <a:spcPts val="0"/>
@@ -26499,7 +26167,7 @@
                     <a:p>
                       <a:pPr algn="l">
                         <a:lnSpc>
-                          <a:spcPct val="82000"/>
+                          <a:spcPct val="90000"/>
                         </a:lnSpc>
                         <a:spcBef>
                           <a:spcPts val="0"/>
@@ -26532,7 +26200,7 @@
                     <a:p>
                       <a:pPr algn="l">
                         <a:lnSpc>
-                          <a:spcPct val="82000"/>
+                          <a:spcPct val="90000"/>
                         </a:lnSpc>
                         <a:spcBef>
                           <a:spcPts val="0"/>
@@ -26565,7 +26233,7 @@
                     <a:p>
                       <a:pPr algn="l">
                         <a:lnSpc>
-                          <a:spcPct val="82000"/>
+                          <a:spcPct val="90000"/>
                         </a:lnSpc>
                         <a:spcBef>
                           <a:spcPts val="0"/>
@@ -26592,305 +26260,6 @@
                   </a:tcPr>
                 </a:tc>
               </a:tr>
-              <a:tr h="192024">
-                <a:tc>
-                  <a:txBody>
-                    <a:bodyPr/>
-                    <a:lstStyle/>
-                    <a:p>
-                      <a:pPr algn="ctr">
-                        <a:lnSpc>
-                          <a:spcPct val="82000"/>
-                        </a:lnSpc>
-                        <a:spcBef>
-                          <a:spcPts val="0"/>
-                        </a:spcBef>
-                        <a:spcAft>
-                          <a:spcPts val="0"/>
-                        </a:spcAft>
-                      </a:pPr>
-                      <a:r>
-                        <a:rPr sz="900" b="0">
-                          <a:solidFill>
-                            <a:srgbClr val="1F1F1F"/>
-                          </a:solidFill>
-                          <a:latin typeface="KoPubWorld돋움체 Light"/>
-                        </a:rPr>
-                        <a:t>합계</a:t>
-                      </a:r>
-                    </a:p>
-                  </a:txBody>
-                  <a:tcPr marL="54864" marR="54864" marT="0" marB="0">
-                    <a:solidFill>
-                      <a:srgbClr val="FFFFFF"/>
-                    </a:solidFill>
-                  </a:tcPr>
-                </a:tc>
-                <a:tc>
-                  <a:txBody>
-                    <a:bodyPr/>
-                    <a:lstStyle/>
-                    <a:p>
-                      <a:pPr algn="l">
-                        <a:lnSpc>
-                          <a:spcPct val="82000"/>
-                        </a:lnSpc>
-                        <a:spcBef>
-                          <a:spcPts val="0"/>
-                        </a:spcBef>
-                        <a:spcAft>
-                          <a:spcPts val="0"/>
-                        </a:spcAft>
-                      </a:pPr>
-                      <a:r>
-                        <a:rPr sz="900" b="0">
-                          <a:solidFill>
-                            <a:srgbClr val="1F1F1F"/>
-                          </a:solidFill>
-                          <a:latin typeface="KoPubWorld돋움체 Light"/>
-                        </a:rPr>
-                        <a:t/>
-                      </a:r>
-                    </a:p>
-                  </a:txBody>
-                  <a:tcPr marL="54864" marR="54864" marT="0" marB="0">
-                    <a:solidFill>
-                      <a:srgbClr val="FFFFFF"/>
-                    </a:solidFill>
-                  </a:tcPr>
-                </a:tc>
-                <a:tc>
-                  <a:txBody>
-                    <a:bodyPr/>
-                    <a:lstStyle/>
-                    <a:p>
-                      <a:pPr algn="l">
-                        <a:lnSpc>
-                          <a:spcPct val="82000"/>
-                        </a:lnSpc>
-                        <a:spcBef>
-                          <a:spcPts val="0"/>
-                        </a:spcBef>
-                        <a:spcAft>
-                          <a:spcPts val="0"/>
-                        </a:spcAft>
-                      </a:pPr>
-                      <a:r>
-                        <a:rPr sz="900" b="0">
-                          <a:solidFill>
-                            <a:srgbClr val="1F1F1F"/>
-                          </a:solidFill>
-                          <a:latin typeface="KoPubWorld돋움체 Light"/>
-                        </a:rPr>
-                        <a:t>98,800</a:t>
-                      </a:r>
-                    </a:p>
-                  </a:txBody>
-                  <a:tcPr marL="54864" marR="54864" marT="0" marB="0">
-                    <a:solidFill>
-                      <a:srgbClr val="FFFFFF"/>
-                    </a:solidFill>
-                  </a:tcPr>
-                </a:tc>
-                <a:tc>
-                  <a:txBody>
-                    <a:bodyPr/>
-                    <a:lstStyle/>
-                    <a:p>
-                      <a:pPr algn="l">
-                        <a:lnSpc>
-                          <a:spcPct val="82000"/>
-                        </a:lnSpc>
-                        <a:spcBef>
-                          <a:spcPts val="0"/>
-                        </a:spcBef>
-                        <a:spcAft>
-                          <a:spcPts val="0"/>
-                        </a:spcAft>
-                      </a:pPr>
-                      <a:r>
-                        <a:rPr sz="900" b="0">
-                          <a:solidFill>
-                            <a:srgbClr val="1F1F1F"/>
-                          </a:solidFill>
-                          <a:latin typeface="KoPubWorld돋움체 Light"/>
-                        </a:rPr>
-                        <a:t/>
-                      </a:r>
-                    </a:p>
-                  </a:txBody>
-                  <a:tcPr marL="54864" marR="54864" marT="0" marB="0">
-                    <a:solidFill>
-                      <a:srgbClr val="FFFFFF"/>
-                    </a:solidFill>
-                  </a:tcPr>
-                </a:tc>
-                <a:tc>
-                  <a:txBody>
-                    <a:bodyPr/>
-                    <a:lstStyle/>
-                    <a:p>
-                      <a:pPr algn="l">
-                        <a:lnSpc>
-                          <a:spcPct val="82000"/>
-                        </a:lnSpc>
-                        <a:spcBef>
-                          <a:spcPts val="0"/>
-                        </a:spcBef>
-                        <a:spcAft>
-                          <a:spcPts val="0"/>
-                        </a:spcAft>
-                      </a:pPr>
-                      <a:r>
-                        <a:rPr sz="900" b="0">
-                          <a:solidFill>
-                            <a:srgbClr val="1F1F1F"/>
-                          </a:solidFill>
-                          <a:latin typeface="KoPubWorld돋움체 Light"/>
-                        </a:rPr>
-                        <a:t>6,354,783</a:t>
-                      </a:r>
-                    </a:p>
-                  </a:txBody>
-                  <a:tcPr marL="54864" marR="54864" marT="0" marB="0">
-                    <a:solidFill>
-                      <a:srgbClr val="FFFFFF"/>
-                    </a:solidFill>
-                  </a:tcPr>
-                </a:tc>
-                <a:tc>
-                  <a:txBody>
-                    <a:bodyPr/>
-                    <a:lstStyle/>
-                    <a:p>
-                      <a:pPr algn="l">
-                        <a:lnSpc>
-                          <a:spcPct val="82000"/>
-                        </a:lnSpc>
-                        <a:spcBef>
-                          <a:spcPts val="0"/>
-                        </a:spcBef>
-                        <a:spcAft>
-                          <a:spcPts val="0"/>
-                        </a:spcAft>
-                      </a:pPr>
-                      <a:r>
-                        <a:rPr sz="900" b="0">
-                          <a:solidFill>
-                            <a:srgbClr val="1F1F1F"/>
-                          </a:solidFill>
-                          <a:latin typeface="KoPubWorld돋움체 Light"/>
-                        </a:rPr>
-                        <a:t>100.0%</a:t>
-                      </a:r>
-                    </a:p>
-                  </a:txBody>
-                  <a:tcPr marL="54864" marR="54864" marT="0" marB="0">
-                    <a:solidFill>
-                      <a:srgbClr val="FFFFFF"/>
-                    </a:solidFill>
-                  </a:tcPr>
-                </a:tc>
-                <a:tc>
-                  <a:txBody>
-                    <a:bodyPr/>
-                    <a:lstStyle/>
-                    <a:p>
-                      <a:pPr algn="l">
-                        <a:lnSpc>
-                          <a:spcPct val="82000"/>
-                        </a:lnSpc>
-                        <a:spcBef>
-                          <a:spcPts val="0"/>
-                        </a:spcBef>
-                        <a:spcAft>
-                          <a:spcPts val="0"/>
-                        </a:spcAft>
-                      </a:pPr>
-                      <a:r>
-                        <a:rPr sz="900" b="0">
-                          <a:solidFill>
-                            <a:srgbClr val="1F1F1F"/>
-                          </a:solidFill>
-                          <a:latin typeface="KoPubWorld돋움체 Light"/>
-                        </a:rPr>
-                        <a:t>5,040,000</a:t>
-                      </a:r>
-                    </a:p>
-                  </a:txBody>
-                  <a:tcPr marL="54864" marR="54864" marT="0" marB="0">
-                    <a:solidFill>
-                      <a:srgbClr val="FFFFFF"/>
-                    </a:solidFill>
-                  </a:tcPr>
-                </a:tc>
-                <a:tc>
-                  <a:txBody>
-                    <a:bodyPr/>
-                    <a:lstStyle/>
-                    <a:p>
-                      <a:pPr algn="l">
-                        <a:lnSpc>
-                          <a:spcPct val="82000"/>
-                        </a:lnSpc>
-                        <a:spcBef>
-                          <a:spcPts val="0"/>
-                        </a:spcBef>
-                        <a:spcAft>
-                          <a:spcPts val="0"/>
-                        </a:spcAft>
-                      </a:pPr>
-                      <a:r>
-                        <a:rPr sz="900" b="0">
-                          <a:solidFill>
-                            <a:srgbClr val="1F1F1F"/>
-                          </a:solidFill>
-                          <a:latin typeface="KoPubWorld돋움체 Light"/>
-                        </a:rPr>
-                        <a:t>100.0%</a:t>
-                      </a:r>
-                    </a:p>
-                  </a:txBody>
-                  <a:tcPr marL="54864" marR="54864" marT="0" marB="0">
-                    <a:solidFill>
-                      <a:srgbClr val="FFFFFF"/>
-                    </a:solidFill>
-                  </a:tcPr>
-                </a:tc>
-                <a:tc>
-                  <a:txBody>
-                    <a:bodyPr/>
-                    <a:lstStyle/>
-                    <a:p>
-                      <a:pPr algn="l">
-                        <a:lnSpc>
-                          <a:spcPct val="82000"/>
-                        </a:lnSpc>
-                        <a:spcBef>
-                          <a:spcPts val="0"/>
-                        </a:spcBef>
-                        <a:spcAft>
-                          <a:spcPts val="0"/>
-                        </a:spcAft>
-                      </a:pPr>
-                      <a:r>
-                        <a:rPr sz="900" b="0">
-                          <a:solidFill>
-                            <a:srgbClr val="1F1F1F"/>
-                          </a:solidFill>
-                          <a:latin typeface="KoPubWorld돋움체 Light"/>
-                        </a:rPr>
-                        <a:t>무의결권 비율 20.7%</a:t>
-                      </a:r>
-                    </a:p>
-                  </a:txBody>
-                  <a:tcPr marL="54864" marR="54864" marT="0" marB="0">
-                    <a:solidFill>
-                      <a:srgbClr val="FFFFFF"/>
-                    </a:solidFill>
-                  </a:tcPr>
-                </a:tc>
-              </a:tr>
             </a:tbl>
           </a:graphicData>
         </a:graphic>
@@ -26903,7 +26272,7 @@
         </p:nvSpPr>
         <p:spPr>
           <a:xfrm>
-            <a:off x="283464" y="6510528"/>
+            <a:off x="283464" y="6492240"/>
             <a:ext cx="10012680" cy="274320"/>
           </a:xfrm>
           <a:prstGeom prst="rect">
@@ -26924,7 +26293,7 @@
                 </a:solidFill>
                 <a:latin typeface="KoPubWorld돋움체 Light"/>
               </a:rPr>
-              <a:t>* 지분율 = 주식수 ÷ 발행주식총수, 의결권비율 = 의결권주식수 ÷ 의결권주식총수(5,040,000주). 3종 주식수는 100억 ÷ 23,000원(단수 절상). 2-1/2-2종 배분(280/220억)은 확정 배정 기준이며 기준 재무모델(각 250억)과 차이</a:t>
+              <a:t>* 합계: 투자금 98,800백만 원, 주식수 6,354,783주(의결권 5,040,000주). 지분율 = 주식수 ÷ 발행주식총수, 의결권비율 = 의결권주식수 ÷ 5,040,000주. 3종 주식수 = 100억 ÷ 23,000원(절상)</a:t>
             </a:r>
           </a:p>
         </p:txBody>
@@ -26937,7 +26306,7 @@
         </p:nvSpPr>
         <p:spPr>
           <a:xfrm>
-            <a:off x="283464" y="6647688"/>
+            <a:off x="283464" y="6638544"/>
             <a:ext cx="10012680" cy="274320"/>
           </a:xfrm>
           <a:prstGeom prst="rect">
@@ -26958,7 +26327,7 @@
                 </a:solidFill>
                 <a:latin typeface="KoPubWorld돋움체 Light"/>
               </a:rPr>
-              <a:t>※ 출처: 3종 종류주 지분구성 검토표(2026-09-29), 투자자별 LOC(INDEX #20~23). 내부 검토안으로 협의 과정에서 변동될 수 있으며, 3종 조건 변경 시 정관·주주간계약·영업인가 신청서 반영 필요</a:t>
+              <a:t>※ 출처: 3종 종류주 지분구성 검토표(2026-09-29), 투자자별 LOC(INDEX #20~23). 2-1/2-2종 280/220억은 확정 배정 기준(기준 모델 각 250억). 내부 검토안, 협의 과정에서 변동 가능</a:t>
             </a:r>
           </a:p>
         </p:txBody>
